--- a/Lesson 1/OrangeEnglish_Lesson1_UnderstandingLineGraphs.pptx
+++ b/Lesson 1/OrangeEnglish_Lesson1_UnderstandingLineGraphs.pptx
@@ -9504,7 +9504,7 @@
                 <a:ea typeface="Inter" pitchFamily="34" charset="-122"/>
                 <a:cs typeface="Inter" pitchFamily="34" charset="-120"/>
               </a:rPr>
-              <a:t>Lesson 1 of 6 · IELTS Writing Task 1 · orangeenglish.nl</a:t>
+              <a:t>Lesson 1 of 8 · IELTS Writing Task 1 · orangeenglish.nl</a:t>
             </a:r>
             <a:endParaRPr lang="en-US" sz="1800" dirty="0"/>
           </a:p>

--- a/Lesson 1/OrangeEnglish_Lesson1_UnderstandingLineGraphs.pptx
+++ b/Lesson 1/OrangeEnglish_Lesson1_UnderstandingLineGraphs.pptx
@@ -1599,6 +1599,10 @@
           </a:solidFill>
           <a:ln/>
         </p:spPr>
+        <p:txBody>
+          <a:bodyPr/>
+          <a:p/>
+        </p:txBody>
       </p:sp>
       <p:pic>
         <p:nvPicPr>
@@ -1968,6 +1972,10 @@
           </a:solidFill>
           <a:ln/>
         </p:spPr>
+        <p:txBody>
+          <a:bodyPr/>
+          <a:p/>
+        </p:txBody>
       </p:sp>
       <p:pic>
         <p:nvPicPr>
@@ -2579,6 +2587,10 @@
           </a:solidFill>
           <a:ln/>
         </p:spPr>
+        <p:txBody>
+          <a:bodyPr/>
+          <a:p/>
+        </p:txBody>
       </p:sp>
       <p:pic>
         <p:nvPicPr>
@@ -2677,7 +2689,7 @@
         <p:spPr>
           <a:xfrm>
             <a:off x="1238250" y="3856286"/>
-            <a:ext cx="7118696" cy="1383581"/>
+            <a:ext cx="9208852" cy="2057549"/>
           </a:xfrm>
           <a:prstGeom prst="rect">
             <a:avLst/>
@@ -2698,7 +2710,7 @@
               <a:buNone/>
             </a:pPr>
             <a:r>
-              <a:rPr lang="en-US" sz="4350" b="1" dirty="0">
+              <a:rPr lang="en-US" sz="4350" dirty="0">
                 <a:solidFill>
                   <a:srgbClr val="292929"/>
                 </a:solidFill>
@@ -2706,69 +2718,11 @@
                 <a:ea typeface="Montserrat" pitchFamily="34" charset="-122"/>
                 <a:cs typeface="Montserrat" pitchFamily="34" charset="-120"/>
               </a:rPr>
-              <a:t>A line graph shows how something</a:t>
+              <a:t>A line graph shows how something </a:t>
             </a:r>
             <a:endParaRPr lang="en-US" sz="4350" dirty="0"/>
-          </a:p>
-        </p:txBody>
-      </p:sp>
-      <p:pic>
-        <p:nvPicPr>
-          <p:cNvPr id="7" name="Image 2" descr="preencoded.png">    </p:cNvPr>
-          <p:cNvPicPr>
-            <a:picLocks noChangeAspect="1"/>
-          </p:cNvPicPr>
-          <p:nvPr/>
-        </p:nvPicPr>
-        <p:blipFill>
-          <a:blip r:embed="rId3">
-            <a:alphaModFix amt="95000"/>
-          </a:blip>
-          <a:stretch>
-            <a:fillRect/>
-          </a:stretch>
-        </p:blipFill>
-        <p:spPr>
-          <a:xfrm>
-            <a:off x="4424065" y="4530254"/>
-            <a:ext cx="5600179" cy="673968"/>
-          </a:xfrm>
-          <a:prstGeom prst="rect">
-            <a:avLst/>
-          </a:prstGeom>
-        </p:spPr>
-      </p:pic>
-      <p:sp>
-        <p:nvSpPr>
-          <p:cNvPr id="8" name="Text 3"/>
-          <p:cNvSpPr/>
-          <p:nvPr/>
-        </p:nvSpPr>
-        <p:spPr>
-          <a:xfrm>
-            <a:off x="4538365" y="4530254"/>
-            <a:ext cx="5908737" cy="709613"/>
-          </a:xfrm>
-          <a:prstGeom prst="rect">
-            <a:avLst/>
-          </a:prstGeom>
-          <a:noFill/>
-          <a:ln/>
-        </p:spPr>
-        <p:txBody>
-          <a:bodyPr wrap="none" lIns="25400" tIns="25400" rIns="25400" bIns="25400" rtlCol="0" anchor="t">
-            <a:normAutofit/>
-          </a:bodyPr>
-          <a:lstStyle/>
-          <a:p>
-            <a:pPr algn="l" indent="0" marL="0">
-              <a:lnSpc>
-                <a:spcPct val="122000"/>
-              </a:lnSpc>
-              <a:buNone/>
-            </a:pPr>
-            <a:r>
-              <a:rPr lang="en-US" sz="4350" b="1" dirty="0">
+            <a:r>
+              <a:rPr lang="en-US" sz="4350" dirty="0">
                 <a:solidFill>
                   <a:srgbClr val="292929"/>
                 </a:solidFill>
@@ -2778,41 +2732,8 @@
               </a:rPr>
               <a:t>changes over time</a:t>
             </a:r>
-            <a:endParaRPr lang="en-US" sz="4350" dirty="0"/>
-          </a:p>
-        </p:txBody>
-      </p:sp>
-      <p:sp>
-        <p:nvSpPr>
-          <p:cNvPr id="9" name="Text 4"/>
-          <p:cNvSpPr/>
-          <p:nvPr/>
-        </p:nvSpPr>
-        <p:spPr>
-          <a:xfrm>
-            <a:off x="1238250" y="4530254"/>
-            <a:ext cx="9081152" cy="1383581"/>
-          </a:xfrm>
-          <a:prstGeom prst="rect">
-            <a:avLst/>
-          </a:prstGeom>
-          <a:noFill/>
-          <a:ln/>
-        </p:spPr>
-        <p:txBody>
-          <a:bodyPr wrap="square" lIns="0" tIns="0" rIns="0" bIns="0" rtlCol="0" anchor="t">
-            <a:normAutofit/>
-          </a:bodyPr>
-          <a:lstStyle/>
-          <a:p>
-            <a:pPr algn="l" indent="0" marL="0">
-              <a:lnSpc>
-                <a:spcPct val="122000"/>
-              </a:lnSpc>
-              <a:buNone/>
-            </a:pPr>
-            <a:r>
-              <a:rPr lang="en-US" sz="4350" b="1" dirty="0">
+            <a:r>
+              <a:rPr lang="en-US" sz="4350" dirty="0">
                 <a:solidFill>
                   <a:srgbClr val="292929"/>
                 </a:solidFill>
@@ -2822,7 +2743,6 @@
               </a:rPr>
               <a:t>, plotted as a continuous line.</a:t>
             </a:r>
-            <a:endParaRPr lang="en-US" sz="4350" dirty="0"/>
           </a:p>
         </p:txBody>
       </p:sp>
@@ -2864,7 +2784,7 @@
                 <a:ea typeface="Inter" pitchFamily="34" charset="-122"/>
                 <a:cs typeface="Inter" pitchFamily="34" charset="-120"/>
               </a:rPr>
-              <a:t>It's the </a:t>
+              <a:t>It's one of the </a:t>
             </a:r>
             <a:pPr algn="l" indent="0" marL="0">
               <a:lnSpc>
@@ -2881,7 +2801,7 @@
                 <a:ea typeface="Inter" pitchFamily="34" charset="-122"/>
                 <a:cs typeface="Inter" pitchFamily="34" charset="-120"/>
               </a:rPr>
-              <a:t>most common chart type </a:t>
+              <a:t>most common chart types </a:t>
             </a:r>
             <a:pPr algn="l" indent="0" marL="0">
               <a:lnSpc>
@@ -2934,6 +2854,10 @@
             <a:prstDash val="solid"/>
           </a:ln>
         </p:spPr>
+        <p:txBody>
+          <a:bodyPr/>
+          <a:p/>
+        </p:txBody>
       </p:sp>
       <p:pic>
         <p:nvPicPr>
@@ -3091,6 +3015,10 @@
           </a:solidFill>
           <a:ln/>
         </p:spPr>
+        <p:txBody>
+          <a:bodyPr/>
+          <a:p/>
+        </p:txBody>
       </p:sp>
       <p:pic>
         <p:nvPicPr>
@@ -3254,6 +3182,10 @@
             <a:prstDash val="solid"/>
           </a:ln>
         </p:spPr>
+        <p:txBody>
+          <a:bodyPr/>
+          <a:p/>
+        </p:txBody>
       </p:sp>
       <p:pic>
         <p:nvPicPr>
@@ -3504,6 +3436,10 @@
             <a:prstDash val="solid"/>
           </a:ln>
         </p:spPr>
+        <p:txBody>
+          <a:bodyPr/>
+          <a:p/>
+        </p:txBody>
       </p:sp>
       <p:pic>
         <p:nvPicPr>
@@ -3884,6 +3820,10 @@
           </a:solidFill>
           <a:ln/>
         </p:spPr>
+        <p:txBody>
+          <a:bodyPr/>
+          <a:p/>
+        </p:txBody>
       </p:sp>
       <p:pic>
         <p:nvPicPr>
@@ -4047,6 +3987,10 @@
             <a:prstDash val="solid"/>
           </a:ln>
         </p:spPr>
+        <p:txBody>
+          <a:bodyPr/>
+          <a:p/>
+        </p:txBody>
       </p:sp>
       <p:pic>
         <p:nvPicPr>
@@ -4138,6 +4082,10 @@
           </a:solidFill>
           <a:ln/>
         </p:spPr>
+        <p:txBody>
+          <a:bodyPr/>
+          <a:p/>
+        </p:txBody>
       </p:sp>
       <p:sp>
         <p:nvSpPr>
@@ -4199,6 +4147,10 @@
           </a:solidFill>
           <a:ln/>
         </p:spPr>
+        <p:txBody>
+          <a:bodyPr/>
+          <a:p/>
+        </p:txBody>
       </p:sp>
       <p:sp>
         <p:nvSpPr>
@@ -4260,6 +4212,10 @@
           </a:solidFill>
           <a:ln/>
         </p:spPr>
+        <p:txBody>
+          <a:bodyPr/>
+          <a:p/>
+        </p:txBody>
       </p:sp>
       <p:sp>
         <p:nvSpPr>
@@ -4326,6 +4282,10 @@
             <a:prstDash val="solid"/>
           </a:ln>
         </p:spPr>
+        <p:txBody>
+          <a:bodyPr/>
+          <a:p/>
+        </p:txBody>
       </p:sp>
       <p:sp>
         <p:nvSpPr>
@@ -4387,6 +4347,10 @@
           </a:solidFill>
           <a:ln/>
         </p:spPr>
+        <p:txBody>
+          <a:bodyPr/>
+          <a:p/>
+        </p:txBody>
       </p:sp>
       <p:sp>
         <p:nvSpPr>
@@ -5003,6 +4967,10 @@
           </a:solidFill>
           <a:ln/>
         </p:spPr>
+        <p:txBody>
+          <a:bodyPr/>
+          <a:p/>
+        </p:txBody>
       </p:sp>
       <p:sp>
         <p:nvSpPr>
@@ -5252,6 +5220,10 @@
           </a:solidFill>
           <a:ln/>
         </p:spPr>
+        <p:txBody>
+          <a:bodyPr/>
+          <a:p/>
+        </p:txBody>
       </p:sp>
       <p:pic>
         <p:nvPicPr>
@@ -5549,7 +5521,7 @@
         <p:spPr>
           <a:xfrm>
             <a:off x="1238250" y="3560415"/>
-            <a:ext cx="1571848" cy="371475"/>
+            <a:ext cx="4984704" cy="785813"/>
           </a:xfrm>
           <a:prstGeom prst="rect">
             <a:avLst/>
@@ -5578,71 +5550,13 @@
                 <a:ea typeface="Inter" pitchFamily="34" charset="-122"/>
                 <a:cs typeface="Inter" pitchFamily="34" charset="-120"/>
               </a:rPr>
-              <a:t>Choose the</a:t>
+              <a:t>Choose the </a:t>
             </a:r>
             <a:endParaRPr lang="en-US" sz="2175" dirty="0"/>
-          </a:p>
-        </p:txBody>
-      </p:sp>
-      <p:pic>
-        <p:nvPicPr>
-          <p:cNvPr id="12" name="Image 3" descr="preencoded.png">    </p:cNvPr>
-          <p:cNvPicPr>
-            <a:picLocks noChangeAspect="1"/>
-          </p:cNvPicPr>
-          <p:nvPr/>
-        </p:nvPicPr>
-        <p:blipFill>
-          <a:blip r:embed="rId4">
-            <a:alphaModFix amt="95000"/>
-          </a:blip>
-          <a:stretch>
-            <a:fillRect/>
-          </a:stretch>
-        </p:blipFill>
-        <p:spPr>
-          <a:xfrm>
-            <a:off x="2735387" y="3512790"/>
-            <a:ext cx="2188369" cy="433388"/>
-          </a:xfrm>
-          <a:prstGeom prst="rect">
-            <a:avLst/>
-          </a:prstGeom>
-        </p:spPr>
-      </p:pic>
-      <p:sp>
-        <p:nvSpPr>
-          <p:cNvPr id="13" name="Text 7"/>
-          <p:cNvSpPr/>
-          <p:nvPr/>
-        </p:nvSpPr>
-        <p:spPr>
-          <a:xfrm>
-            <a:off x="2811587" y="3560415"/>
-            <a:ext cx="2239566" cy="371475"/>
-          </a:xfrm>
-          <a:prstGeom prst="rect">
-            <a:avLst/>
-          </a:prstGeom>
-          <a:noFill/>
-          <a:ln/>
-        </p:spPr>
-        <p:txBody>
-          <a:bodyPr wrap="none" lIns="25400" tIns="25400" rIns="25400" bIns="25400" rtlCol="0" anchor="t">
-            <a:normAutofit/>
-          </a:bodyPr>
-          <a:lstStyle/>
-          <a:p>
-            <a:pPr algn="l" indent="0" marL="0">
-              <a:lnSpc>
-                <a:spcPct val="150000"/>
-              </a:lnSpc>
-              <a:buNone/>
-            </a:pPr>
-            <a:r>
-              <a:rPr lang="en-US" sz="2175" b="1" dirty="0">
-                <a:solidFill>
-                  <a:srgbClr val="292929"/>
+            <a:r>
+              <a:rPr lang="en-US" sz="2175" dirty="0" b="1">
+                <a:solidFill>
+                  <a:srgbClr val="6B625B"/>
                 </a:solidFill>
                 <a:latin typeface="Inter" pitchFamily="34" charset="0"/>
                 <a:ea typeface="Inter" pitchFamily="34" charset="-122"/>
@@ -5650,39 +5564,6 @@
               </a:rPr>
               <a:t>most important</a:t>
             </a:r>
-            <a:endParaRPr lang="en-US" sz="2175" dirty="0"/>
-          </a:p>
-        </p:txBody>
-      </p:sp>
-      <p:sp>
-        <p:nvSpPr>
-          <p:cNvPr id="14" name="Text 8"/>
-          <p:cNvSpPr/>
-          <p:nvPr/>
-        </p:nvSpPr>
-        <p:spPr>
-          <a:xfrm>
-            <a:off x="1238250" y="3560415"/>
-            <a:ext cx="4984704" cy="785813"/>
-          </a:xfrm>
-          <a:prstGeom prst="rect">
-            <a:avLst/>
-          </a:prstGeom>
-          <a:noFill/>
-          <a:ln/>
-        </p:spPr>
-        <p:txBody>
-          <a:bodyPr wrap="square" lIns="0" tIns="0" rIns="0" bIns="0" rtlCol="0" anchor="t">
-            <a:normAutofit/>
-          </a:bodyPr>
-          <a:lstStyle/>
-          <a:p>
-            <a:pPr algn="l" indent="0" marL="0">
-              <a:lnSpc>
-                <a:spcPct val="150000"/>
-              </a:lnSpc>
-              <a:buNone/>
-            </a:pPr>
             <a:r>
               <a:rPr lang="en-US" sz="2175" dirty="0">
                 <a:solidFill>
@@ -5692,9 +5573,8 @@
                 <a:ea typeface="Inter" pitchFamily="34" charset="-122"/>
                 <a:cs typeface="Inter" pitchFamily="34" charset="-120"/>
               </a:rPr>
-              <a:t>features. Don't describe everything.</a:t>
-            </a:r>
-            <a:endParaRPr lang="en-US" sz="2175" dirty="0"/>
+              <a:t> features. Don't describe everything.</a:t>
+            </a:r>
           </a:p>
         </p:txBody>
       </p:sp>
@@ -5818,7 +5698,7 @@
         <p:spPr>
           <a:xfrm>
             <a:off x="6680150" y="3560415"/>
-            <a:ext cx="2085603" cy="371475"/>
+            <a:ext cx="4835014" cy="785813"/>
           </a:xfrm>
           <a:prstGeom prst="rect">
             <a:avLst/>
@@ -5847,71 +5727,13 @@
                 <a:ea typeface="Inter" pitchFamily="34" charset="-122"/>
                 <a:cs typeface="Inter" pitchFamily="34" charset="-120"/>
               </a:rPr>
-              <a:t>Report the data</a:t>
+              <a:t>Report the data </a:t>
             </a:r>
             <a:endParaRPr lang="en-US" sz="2175" dirty="0"/>
-          </a:p>
-        </p:txBody>
-      </p:sp>
-      <p:pic>
-        <p:nvPicPr>
-          <p:cNvPr id="19" name="Image 5" descr="preencoded.png">    </p:cNvPr>
-          <p:cNvPicPr>
-            <a:picLocks noChangeAspect="1"/>
-          </p:cNvPicPr>
-          <p:nvPr/>
-        </p:nvPicPr>
-        <p:blipFill>
-          <a:blip r:embed="rId6">
-            <a:alphaModFix amt="95000"/>
-          </a:blip>
-          <a:stretch>
-            <a:fillRect/>
-          </a:stretch>
-        </p:blipFill>
-        <p:spPr>
-          <a:xfrm>
-            <a:off x="8691042" y="3512790"/>
-            <a:ext cx="1563142" cy="433388"/>
-          </a:xfrm>
-          <a:prstGeom prst="rect">
-            <a:avLst/>
-          </a:prstGeom>
-        </p:spPr>
-      </p:pic>
-      <p:sp>
-        <p:nvSpPr>
-          <p:cNvPr id="20" name="Text 12"/>
-          <p:cNvSpPr/>
-          <p:nvPr/>
-        </p:nvSpPr>
-        <p:spPr>
-          <a:xfrm>
-            <a:off x="8767242" y="3560415"/>
-            <a:ext cx="1551816" cy="371475"/>
-          </a:xfrm>
-          <a:prstGeom prst="rect">
-            <a:avLst/>
-          </a:prstGeom>
-          <a:noFill/>
-          <a:ln/>
-        </p:spPr>
-        <p:txBody>
-          <a:bodyPr wrap="none" lIns="25400" tIns="25400" rIns="25400" bIns="25400" rtlCol="0" anchor="t">
-            <a:normAutofit/>
-          </a:bodyPr>
-          <a:lstStyle/>
-          <a:p>
-            <a:pPr algn="l" indent="0" marL="0">
-              <a:lnSpc>
-                <a:spcPct val="150000"/>
-              </a:lnSpc>
-              <a:buNone/>
-            </a:pPr>
-            <a:r>
-              <a:rPr lang="en-US" sz="2175" b="1" dirty="0">
-                <a:solidFill>
-                  <a:srgbClr val="292929"/>
+            <a:r>
+              <a:rPr lang="en-US" sz="2175" dirty="0" b="1">
+                <a:solidFill>
+                  <a:srgbClr val="6B625B"/>
                 </a:solidFill>
                 <a:latin typeface="Inter" pitchFamily="34" charset="0"/>
                 <a:ea typeface="Inter" pitchFamily="34" charset="-122"/>
@@ -5919,39 +5741,6 @@
               </a:rPr>
               <a:t>accurately</a:t>
             </a:r>
-            <a:endParaRPr lang="en-US" sz="2175" dirty="0"/>
-          </a:p>
-        </p:txBody>
-      </p:sp>
-      <p:sp>
-        <p:nvSpPr>
-          <p:cNvPr id="21" name="Text 13"/>
-          <p:cNvSpPr/>
-          <p:nvPr/>
-        </p:nvSpPr>
-        <p:spPr>
-          <a:xfrm>
-            <a:off x="6680150" y="3560415"/>
-            <a:ext cx="4835014" cy="785813"/>
-          </a:xfrm>
-          <a:prstGeom prst="rect">
-            <a:avLst/>
-          </a:prstGeom>
-          <a:noFill/>
-          <a:ln/>
-        </p:spPr>
-        <p:txBody>
-          <a:bodyPr wrap="square" lIns="0" tIns="0" rIns="0" bIns="0" rtlCol="0" anchor="t">
-            <a:normAutofit/>
-          </a:bodyPr>
-          <a:lstStyle/>
-          <a:p>
-            <a:pPr algn="l" indent="0" marL="0">
-              <a:lnSpc>
-                <a:spcPct val="150000"/>
-              </a:lnSpc>
-              <a:buNone/>
-            </a:pPr>
             <a:r>
               <a:rPr lang="en-US" sz="2175" dirty="0">
                 <a:solidFill>
@@ -5963,7 +5752,6 @@
               </a:rPr>
               <a:t>, with the right units.</a:t>
             </a:r>
-            <a:endParaRPr lang="en-US" sz="2175" dirty="0"/>
           </a:p>
         </p:txBody>
       </p:sp>
@@ -6087,7 +5875,7 @@
         <p:spPr>
           <a:xfrm>
             <a:off x="12122125" y="3560415"/>
-            <a:ext cx="2605162" cy="371475"/>
+            <a:ext cx="4543834" cy="785813"/>
           </a:xfrm>
           <a:prstGeom prst="rect">
             <a:avLst/>
@@ -6116,71 +5904,13 @@
                 <a:ea typeface="Inter" pitchFamily="34" charset="-122"/>
                 <a:cs typeface="Inter" pitchFamily="34" charset="-120"/>
               </a:rPr>
-              <a:t>Show how the lines</a:t>
+              <a:t>Show how the lines </a:t>
             </a:r>
             <a:endParaRPr lang="en-US" sz="2175" dirty="0"/>
-          </a:p>
-        </p:txBody>
-      </p:sp>
-      <p:pic>
-        <p:nvPicPr>
-          <p:cNvPr id="26" name="Image 7" descr="preencoded.png">    </p:cNvPr>
-          <p:cNvPicPr>
-            <a:picLocks noChangeAspect="1"/>
-          </p:cNvPicPr>
-          <p:nvPr/>
-        </p:nvPicPr>
-        <p:blipFill>
-          <a:blip r:embed="rId8">
-            <a:alphaModFix amt="95000"/>
-          </a:blip>
-          <a:stretch>
-            <a:fillRect/>
-          </a:stretch>
-        </p:blipFill>
-        <p:spPr>
-          <a:xfrm>
-            <a:off x="14652575" y="3512790"/>
-            <a:ext cx="908521" cy="433388"/>
-          </a:xfrm>
-          <a:prstGeom prst="rect">
-            <a:avLst/>
-          </a:prstGeom>
-        </p:spPr>
-      </p:pic>
-      <p:sp>
-        <p:nvSpPr>
-          <p:cNvPr id="27" name="Text 17"/>
-          <p:cNvSpPr/>
-          <p:nvPr/>
-        </p:nvSpPr>
-        <p:spPr>
-          <a:xfrm>
-            <a:off x="14728775" y="3560415"/>
-            <a:ext cx="832321" cy="371475"/>
-          </a:xfrm>
-          <a:prstGeom prst="rect">
-            <a:avLst/>
-          </a:prstGeom>
-          <a:noFill/>
-          <a:ln/>
-        </p:spPr>
-        <p:txBody>
-          <a:bodyPr wrap="none" lIns="25400" tIns="25400" rIns="25400" bIns="25400" rtlCol="0" anchor="t">
-            <a:normAutofit/>
-          </a:bodyPr>
-          <a:lstStyle/>
-          <a:p>
-            <a:pPr algn="l" indent="0" marL="0">
-              <a:lnSpc>
-                <a:spcPct val="150000"/>
-              </a:lnSpc>
-              <a:buNone/>
-            </a:pPr>
-            <a:r>
-              <a:rPr lang="en-US" sz="2175" b="1" dirty="0">
-                <a:solidFill>
-                  <a:srgbClr val="292929"/>
+            <a:r>
+              <a:rPr lang="en-US" sz="2175" dirty="0" b="1">
+                <a:solidFill>
+                  <a:srgbClr val="6B625B"/>
                 </a:solidFill>
                 <a:latin typeface="Inter" pitchFamily="34" charset="0"/>
                 <a:ea typeface="Inter" pitchFamily="34" charset="-122"/>
@@ -6188,39 +5918,6 @@
               </a:rPr>
               <a:t>relate</a:t>
             </a:r>
-            <a:endParaRPr lang="en-US" sz="2175" dirty="0"/>
-          </a:p>
-        </p:txBody>
-      </p:sp>
-      <p:sp>
-        <p:nvSpPr>
-          <p:cNvPr id="28" name="Text 18"/>
-          <p:cNvSpPr/>
-          <p:nvPr/>
-        </p:nvSpPr>
-        <p:spPr>
-          <a:xfrm>
-            <a:off x="12122125" y="3560415"/>
-            <a:ext cx="4543834" cy="785813"/>
-          </a:xfrm>
-          <a:prstGeom prst="rect">
-            <a:avLst/>
-          </a:prstGeom>
-          <a:noFill/>
-          <a:ln/>
-        </p:spPr>
-        <p:txBody>
-          <a:bodyPr wrap="square" lIns="0" tIns="0" rIns="0" bIns="0" rtlCol="0" anchor="t">
-            <a:normAutofit/>
-          </a:bodyPr>
-          <a:lstStyle/>
-          <a:p>
-            <a:pPr algn="l" indent="0" marL="0">
-              <a:lnSpc>
-                <a:spcPct val="150000"/>
-              </a:lnSpc>
-              <a:buNone/>
-            </a:pPr>
             <a:r>
               <a:rPr lang="en-US" sz="2175" dirty="0">
                 <a:solidFill>
@@ -6230,9 +5927,8 @@
                 <a:ea typeface="Inter" pitchFamily="34" charset="-122"/>
                 <a:cs typeface="Inter" pitchFamily="34" charset="-120"/>
               </a:rPr>
-              <a:t>to each other.</a:t>
-            </a:r>
-            <a:endParaRPr lang="en-US" sz="2175" dirty="0"/>
+              <a:t> to each other.</a:t>
+            </a:r>
           </a:p>
         </p:txBody>
       </p:sp>
@@ -6266,6 +5962,10 @@
             <a:prstDash val="solid"/>
           </a:ln>
         </p:spPr>
+        <p:txBody>
+          <a:bodyPr/>
+          <a:p/>
+        </p:txBody>
       </p:sp>
       <p:sp>
         <p:nvSpPr>
@@ -6286,6 +5986,10 @@
           </a:solidFill>
           <a:ln/>
         </p:spPr>
+        <p:txBody>
+          <a:bodyPr/>
+          <a:p/>
+        </p:txBody>
       </p:sp>
       <p:sp>
         <p:nvSpPr>
@@ -6804,6 +6508,10 @@
           </a:solidFill>
           <a:ln/>
         </p:spPr>
+        <p:txBody>
+          <a:bodyPr/>
+          <a:p/>
+        </p:txBody>
       </p:sp>
       <p:pic>
         <p:nvPicPr>
@@ -7708,6 +7416,10 @@
           </a:solidFill>
           <a:ln/>
         </p:spPr>
+        <p:txBody>
+          <a:bodyPr/>
+          <a:p/>
+        </p:txBody>
       </p:sp>
       <p:pic>
         <p:nvPicPr>
@@ -7947,6 +7659,10 @@
           </a:solidFill>
           <a:ln/>
         </p:spPr>
+        <p:txBody>
+          <a:bodyPr/>
+          <a:p/>
+        </p:txBody>
       </p:sp>
       <p:sp>
         <p:nvSpPr>
@@ -8010,6 +7726,10 @@
           </a:solidFill>
           <a:ln/>
         </p:spPr>
+        <p:txBody>
+          <a:bodyPr/>
+          <a:p/>
+        </p:txBody>
       </p:sp>
       <p:sp>
         <p:nvSpPr>
@@ -8073,6 +7793,10 @@
           </a:solidFill>
           <a:ln/>
         </p:spPr>
+        <p:txBody>
+          <a:bodyPr/>
+          <a:p/>
+        </p:txBody>
       </p:sp>
       <p:sp>
         <p:nvSpPr>
@@ -8136,6 +7860,10 @@
           </a:solidFill>
           <a:ln/>
         </p:spPr>
+        <p:txBody>
+          <a:bodyPr/>
+          <a:p/>
+        </p:txBody>
       </p:sp>
       <p:sp>
         <p:nvSpPr>
@@ -8199,6 +7927,10 @@
           </a:solidFill>
           <a:ln/>
         </p:spPr>
+        <p:txBody>
+          <a:bodyPr/>
+          <a:p/>
+        </p:txBody>
       </p:sp>
       <p:sp>
         <p:nvSpPr>
@@ -8262,6 +7994,10 @@
           </a:solidFill>
           <a:ln/>
         </p:spPr>
+        <p:txBody>
+          <a:bodyPr/>
+          <a:p/>
+        </p:txBody>
       </p:sp>
       <p:sp>
         <p:nvSpPr>
@@ -8334,6 +8070,10 @@
             <a:prstDash val="dash"/>
           </a:ln>
         </p:spPr>
+        <p:txBody>
+          <a:bodyPr/>
+          <a:p/>
+        </p:txBody>
       </p:sp>
       <p:sp>
         <p:nvSpPr>
@@ -8406,6 +8146,10 @@
             <a:prstDash val="dash"/>
           </a:ln>
         </p:spPr>
+        <p:txBody>
+          <a:bodyPr/>
+          <a:p/>
+        </p:txBody>
       </p:sp>
       <p:sp>
         <p:nvSpPr>
@@ -8478,6 +8222,10 @@
             <a:prstDash val="dash"/>
           </a:ln>
         </p:spPr>
+        <p:txBody>
+          <a:bodyPr/>
+          <a:p/>
+        </p:txBody>
       </p:sp>
       <p:sp>
         <p:nvSpPr>
@@ -8550,6 +8298,10 @@
             <a:prstDash val="dash"/>
           </a:ln>
         </p:spPr>
+        <p:txBody>
+          <a:bodyPr/>
+          <a:p/>
+        </p:txBody>
       </p:sp>
       <p:sp>
         <p:nvSpPr>
@@ -8622,6 +8374,10 @@
             <a:prstDash val="dash"/>
           </a:ln>
         </p:spPr>
+        <p:txBody>
+          <a:bodyPr/>
+          <a:p/>
+        </p:txBody>
       </p:sp>
       <p:sp>
         <p:nvSpPr>
@@ -8694,6 +8450,10 @@
             <a:prstDash val="dash"/>
           </a:ln>
         </p:spPr>
+        <p:txBody>
+          <a:bodyPr/>
+          <a:p/>
+        </p:txBody>
       </p:sp>
       <p:sp>
         <p:nvSpPr>
@@ -8862,6 +8622,10 @@
           </a:solidFill>
           <a:ln/>
         </p:spPr>
+        <p:txBody>
+          <a:bodyPr/>
+          <a:p/>
+        </p:txBody>
       </p:sp>
       <p:pic>
         <p:nvPicPr>
@@ -9014,6 +8778,10 @@
           </a:solidFill>
           <a:ln/>
         </p:spPr>
+        <p:txBody>
+          <a:bodyPr/>
+          <a:p/>
+        </p:txBody>
       </p:sp>
       <p:sp>
         <p:nvSpPr>
@@ -9112,6 +8880,10 @@
           </a:solidFill>
           <a:ln/>
         </p:spPr>
+        <p:txBody>
+          <a:bodyPr/>
+          <a:p/>
+        </p:txBody>
       </p:sp>
       <p:sp>
         <p:nvSpPr>
@@ -9210,6 +8982,10 @@
           </a:solidFill>
           <a:ln/>
         </p:spPr>
+        <p:txBody>
+          <a:bodyPr/>
+          <a:p/>
+        </p:txBody>
       </p:sp>
       <p:sp>
         <p:nvSpPr>
@@ -9308,6 +9084,10 @@
           </a:solidFill>
           <a:ln/>
         </p:spPr>
+        <p:txBody>
+          <a:bodyPr/>
+          <a:p/>
+        </p:txBody>
       </p:sp>
       <p:sp>
         <p:nvSpPr>
@@ -9504,7 +9284,7 @@
                 <a:ea typeface="Inter" pitchFamily="34" charset="-122"/>
                 <a:cs typeface="Inter" pitchFamily="34" charset="-120"/>
               </a:rPr>
-              <a:t>Lesson 1 of 8 · IELTS Writing Task 1 · orangeenglish.nl</a:t>
+              <a:t>Lesson 1 of 6 · IELTS Writing Task 1 · orangeenglish.nl</a:t>
             </a:r>
             <a:endParaRPr lang="en-US" sz="1800" dirty="0"/>
           </a:p>
